--- a/reports/FCX_Q3_2026/Earnings_Update_FCX_Q32026.pptx
+++ b/reports/FCX_Q3_2026/Earnings_Update_FCX_Q32026.pptx
@@ -2689,7 +2689,7 @@
                 <a:ea typeface="Nunito" pitchFamily="34" charset="-122"/>
                 <a:cs typeface="Nunito" pitchFamily="34" charset="-120"/>
               </a:rPr>
-              <a:t>We stay constructive on Freeport and would add on copper-driven weakness. We underwrite volume-led earnings: copper sales up more than 20% in 2027 to about 3.7 billion pounds and 10% more in 2028, with Grasberg at 80% of capacity by mid-2027. At USD 6.50 copper, management’s sensitivities imply roughly USD 17.5bn of annual EBITDA in 2027 to 2028. The multiple sits 12% below its 2021 to 2026 average. The next tests are the Bagdad investment decision this quarter and fourth-quarter copper sales of 875 million pounds.</a:t>
+              <a:t>We are constructive on Freeport, while the fourth quarter and the short-term copper price are the key tests of the investment case. The fourth quarter must deliver 875 million pounds of copper sales, 29% of the 2026 guide, and keep the USD 1.90 per pound full-year cost guide intact. We underwrite volume-led earnings: copper sales up more than 20% in 2027 to about 3.7 billion pounds, with Grasberg at 80% of capacity by mid-2027. Each USD 0.10 per pound move in copper shifts annual EBITDA by about USD 390m.</a:t>
             </a:r>
             <a:endParaRPr lang="en-US" sz="870" dirty="0"/>
           </a:p>
